--- a/exports/pptx/lessons/middle-module-11-multiplication-near-base/day-04-both-above-100.pptx
+++ b/exports/pptx/lessons/middle-module-11-multiplication-near-base/day-04-both-above-100.pptx
@@ -5363,7 +5363,7 @@
         </p:nvSpPr>
         <p:spPr>
           <a:xfrm>
-            <a:off x="406301" y="5855643"/>
+            <a:off x="406301" y="4690914"/>
             <a:ext cx="8498026" cy="213271"/>
           </a:xfrm>
           <a:prstGeom prst="rect">
@@ -5397,76 +5397,7 @@
                 <a:ea typeface="Arial" pitchFamily="34" charset="-122"/>
                 <a:cs typeface="Arial" pitchFamily="34" charset="-120"/>
               </a:rPr>
-              <a:t>In both cases</a:t>
-            </a:r>
-            <a:pPr algn="l" indent="0" marL="0">
-              <a:lnSpc>
-                <a:spcPts val="1680"/>
-              </a:lnSpc>
-              <a:spcBef>
-                <a:spcPts val="300"/>
-              </a:spcBef>
-              <a:spcAft>
-                <a:spcPts val="300"/>
-              </a:spcAft>
-              <a:buNone/>
-            </a:pPr>
-            <a:r>
-              <a:rPr lang="en-US" sz="1200" dirty="0">
-                <a:solidFill>
-                  <a:srgbClr val="1C2833"/>
-                </a:solidFill>
-                <a:latin typeface="Arial" pitchFamily="34" charset="0"/>
-                <a:ea typeface="Arial" pitchFamily="34" charset="-122"/>
-                <a:cs typeface="Arial" pitchFamily="34" charset="-120"/>
-              </a:rPr>
-              <a:t> the right part is a positive product. The sign issue only appears in the </a:t>
-            </a:r>
-            <a:pPr algn="l" indent="0" marL="0">
-              <a:lnSpc>
-                <a:spcPts val="1680"/>
-              </a:lnSpc>
-              <a:spcBef>
-                <a:spcPts val="300"/>
-              </a:spcBef>
-              <a:spcAft>
-                <a:spcPts val="300"/>
-              </a:spcAft>
-              <a:buNone/>
-            </a:pPr>
-            <a:r>
-              <a:rPr lang="en-US" sz="1200" i="1" dirty="0">
-                <a:solidFill>
-                  <a:srgbClr val="1C2833"/>
-                </a:solidFill>
-                <a:latin typeface="Arial" pitchFamily="34" charset="0"/>
-                <a:ea typeface="Arial" pitchFamily="34" charset="-122"/>
-                <a:cs typeface="Arial" pitchFamily="34" charset="-120"/>
-              </a:rPr>
-              <a:t>mixed</a:t>
-            </a:r>
-            <a:pPr algn="l" indent="0" marL="0">
-              <a:lnSpc>
-                <a:spcPts val="1680"/>
-              </a:lnSpc>
-              <a:spcBef>
-                <a:spcPts val="300"/>
-              </a:spcBef>
-              <a:spcAft>
-                <a:spcPts val="300"/>
-              </a:spcAft>
-              <a:buNone/>
-            </a:pPr>
-            <a:r>
-              <a:rPr lang="en-US" sz="1200" dirty="0">
-                <a:solidFill>
-                  <a:srgbClr val="1C2833"/>
-                </a:solidFill>
-                <a:latin typeface="Arial" pitchFamily="34" charset="0"/>
-                <a:ea typeface="Arial" pitchFamily="34" charset="-122"/>
-                <a:cs typeface="Arial" pitchFamily="34" charset="-120"/>
-              </a:rPr>
-              <a:t> case (Day 5).</a:t>
+              <a:t>Each row: Both below · Both above.</a:t>
             </a:r>
             <a:endParaRPr lang="en-US" sz="1200" dirty="0"/>
           </a:p>
@@ -5480,7 +5411,351 @@
         </p:nvSpPr>
         <p:spPr>
           <a:xfrm>
-            <a:off x="634901" y="6157764"/>
+            <a:off x="406301" y="4980384"/>
+            <a:ext cx="8498026" cy="213271"/>
+          </a:xfrm>
+          <a:prstGeom prst="rect">
+            <a:avLst/>
+          </a:prstGeom>
+          <a:noFill/>
+          <a:ln/>
+        </p:spPr>
+        <p:txBody>
+          <a:bodyPr wrap="square" lIns="0" tIns="0" rIns="0" bIns="0" rtlCol="0" anchor="t"/>
+          <a:lstStyle/>
+          <a:p>
+            <a:pPr algn="l" indent="0" marL="0">
+              <a:lnSpc>
+                <a:spcPts val="1680"/>
+              </a:lnSpc>
+              <a:spcBef>
+                <a:spcPts val="300"/>
+              </a:spcBef>
+              <a:spcAft>
+                <a:spcPts val="300"/>
+              </a:spcAft>
+              <a:buNone/>
+            </a:pPr>
+            <a:r>
+              <a:rPr lang="en-US" sz="1200" dirty="0">
+                <a:solidFill>
+                  <a:srgbClr val="1C2833"/>
+                </a:solidFill>
+                <a:latin typeface="Arial" pitchFamily="34" charset="0"/>
+                <a:ea typeface="Arial" pitchFamily="34" charset="-122"/>
+                <a:cs typeface="Arial" pitchFamily="34" charset="-120"/>
+              </a:rPr>
+              <a:t>– Cross-</a:t>
+            </a:r>
+            <a:pPr algn="l" indent="0" marL="0">
+              <a:lnSpc>
+                <a:spcPts val="1680"/>
+              </a:lnSpc>
+              <a:spcBef>
+                <a:spcPts val="300"/>
+              </a:spcBef>
+              <a:spcAft>
+                <a:spcPts val="300"/>
+              </a:spcAft>
+              <a:buNone/>
+            </a:pPr>
+            <a:r>
+              <a:rPr lang="en-US" sz="1200" b="1" dirty="0">
+                <a:solidFill>
+                  <a:srgbClr val="1C2833"/>
+                </a:solidFill>
+                <a:latin typeface="Arial" pitchFamily="34" charset="0"/>
+                <a:ea typeface="Arial" pitchFamily="34" charset="-122"/>
+                <a:cs typeface="Arial" pitchFamily="34" charset="-120"/>
+              </a:rPr>
+              <a:t>subtract</a:t>
+            </a:r>
+            <a:pPr algn="l" indent="0" marL="0">
+              <a:lnSpc>
+                <a:spcPts val="1680"/>
+              </a:lnSpc>
+              <a:spcBef>
+                <a:spcPts val="300"/>
+              </a:spcBef>
+              <a:spcAft>
+                <a:spcPts val="300"/>
+              </a:spcAft>
+              <a:buNone/>
+            </a:pPr>
+            <a:r>
+              <a:rPr lang="en-US" sz="1200" dirty="0">
+                <a:solidFill>
+                  <a:srgbClr val="1C2833"/>
+                </a:solidFill>
+                <a:latin typeface="Arial" pitchFamily="34" charset="0"/>
+                <a:ea typeface="Arial" pitchFamily="34" charset="-122"/>
+                <a:cs typeface="Arial" pitchFamily="34" charset="-120"/>
+              </a:rPr>
+              <a:t> — Cross-</a:t>
+            </a:r>
+            <a:pPr algn="l" indent="0" marL="0">
+              <a:lnSpc>
+                <a:spcPts val="1680"/>
+              </a:lnSpc>
+              <a:spcBef>
+                <a:spcPts val="300"/>
+              </a:spcBef>
+              <a:spcAft>
+                <a:spcPts val="300"/>
+              </a:spcAft>
+              <a:buNone/>
+            </a:pPr>
+            <a:r>
+              <a:rPr lang="en-US" sz="1200" b="1" dirty="0">
+                <a:solidFill>
+                  <a:srgbClr val="1C2833"/>
+                </a:solidFill>
+                <a:latin typeface="Arial" pitchFamily="34" charset="0"/>
+                <a:ea typeface="Arial" pitchFamily="34" charset="-122"/>
+                <a:cs typeface="Arial" pitchFamily="34" charset="-120"/>
+              </a:rPr>
+              <a:t>add</a:t>
+            </a:r>
+            <a:endParaRPr lang="en-US" sz="1200" dirty="0"/>
+          </a:p>
+        </p:txBody>
+      </p:sp>
+      <p:sp>
+        <p:nvSpPr>
+          <p:cNvPr id="19" name="Text 17"/>
+          <p:cNvSpPr/>
+          <p:nvPr/>
+        </p:nvSpPr>
+        <p:spPr>
+          <a:xfrm>
+            <a:off x="634901" y="5282505"/>
+            <a:ext cx="8102798" cy="525661"/>
+          </a:xfrm>
+          <a:prstGeom prst="rect">
+            <a:avLst/>
+          </a:prstGeom>
+          <a:noFill/>
+          <a:ln/>
+        </p:spPr>
+        <p:txBody>
+          <a:bodyPr wrap="square" lIns="0" tIns="0" rIns="0" bIns="0" rtlCol="0" anchor="t"/>
+          <a:lstStyle/>
+          <a:p>
+            <a:pPr algn="l" marL="342900" indent="-342900">
+              <a:lnSpc>
+                <a:spcPts val="1620"/>
+              </a:lnSpc>
+              <a:spcAft>
+                <a:spcPts val="300"/>
+              </a:spcAft>
+              <a:buSzPct val="100000"/>
+              <a:buChar char="•"/>
+            </a:pPr>
+            <a:r>
+              <a:rPr lang="en-US" sz="1200" b="1" dirty="0">
+                <a:solidFill>
+                  <a:srgbClr val="1C2833"/>
+                </a:solidFill>
+                <a:latin typeface="Arial" pitchFamily="34" charset="0"/>
+                <a:ea typeface="Arial" pitchFamily="34" charset="-122"/>
+                <a:cs typeface="Arial" pitchFamily="34" charset="-120"/>
+              </a:rPr>
+              <a:t>Deficit × deficit</a:t>
+            </a:r>
+            <a:pPr algn="l" indent="0" marL="0">
+              <a:lnSpc>
+                <a:spcPts val="1620"/>
+              </a:lnSpc>
+              <a:spcAft>
+                <a:spcPts val="300"/>
+              </a:spcAft>
+              <a:buNone/>
+            </a:pPr>
+            <a:r>
+              <a:rPr lang="en-US" sz="1200" dirty="0">
+                <a:solidFill>
+                  <a:srgbClr val="1C2833"/>
+                </a:solidFill>
+                <a:latin typeface="Arial" pitchFamily="34" charset="0"/>
+                <a:ea typeface="Arial" pitchFamily="34" charset="-122"/>
+                <a:cs typeface="Arial" pitchFamily="34" charset="-120"/>
+              </a:rPr>
+              <a:t> — Excess × excess</a:t>
+            </a:r>
+            <a:endParaRPr lang="en-US" sz="1200" dirty="0"/>
+          </a:p>
+          <a:p>
+            <a:pPr algn="l" marL="342900" indent="-342900">
+              <a:lnSpc>
+                <a:spcPts val="1620"/>
+              </a:lnSpc>
+              <a:spcAft>
+                <a:spcPts val="300"/>
+              </a:spcAft>
+              <a:buSzPct val="100000"/>
+              <a:buChar char="•"/>
+            </a:pPr>
+            <a:r>
+              <a:rPr lang="en-US" sz="1200" b="1" dirty="0">
+                <a:solidFill>
+                  <a:srgbClr val="1C2833"/>
+                </a:solidFill>
+                <a:latin typeface="Arial" pitchFamily="34" charset="0"/>
+                <a:ea typeface="Arial" pitchFamily="34" charset="-122"/>
+                <a:cs typeface="Arial" pitchFamily="34" charset="-120"/>
+              </a:rPr>
+              <a:t>Right part is product of POSITIVE numbers (deficits)</a:t>
+            </a:r>
+            <a:pPr algn="l" indent="0" marL="0">
+              <a:lnSpc>
+                <a:spcPts val="1620"/>
+              </a:lnSpc>
+              <a:spcAft>
+                <a:spcPts val="300"/>
+              </a:spcAft>
+              <a:buNone/>
+            </a:pPr>
+            <a:r>
+              <a:rPr lang="en-US" sz="1200" dirty="0">
+                <a:solidFill>
+                  <a:srgbClr val="1C2833"/>
+                </a:solidFill>
+                <a:latin typeface="Arial" pitchFamily="34" charset="0"/>
+                <a:ea typeface="Arial" pitchFamily="34" charset="-122"/>
+                <a:cs typeface="Arial" pitchFamily="34" charset="-120"/>
+              </a:rPr>
+              <a:t> — Right part is product of POSITIVE numbers (excesses)</a:t>
+            </a:r>
+            <a:endParaRPr lang="en-US" sz="1200" dirty="0"/>
+          </a:p>
+        </p:txBody>
+      </p:sp>
+      <p:sp>
+        <p:nvSpPr>
+          <p:cNvPr id="20" name="Text 18"/>
+          <p:cNvSpPr/>
+          <p:nvPr/>
+        </p:nvSpPr>
+        <p:spPr>
+          <a:xfrm>
+            <a:off x="406301" y="5897017"/>
+            <a:ext cx="8498026" cy="213271"/>
+          </a:xfrm>
+          <a:prstGeom prst="rect">
+            <a:avLst/>
+          </a:prstGeom>
+          <a:noFill/>
+          <a:ln/>
+        </p:spPr>
+        <p:txBody>
+          <a:bodyPr wrap="square" lIns="0" tIns="0" rIns="0" bIns="0" rtlCol="0" anchor="t"/>
+          <a:lstStyle/>
+          <a:p>
+            <a:pPr algn="l" indent="0" marL="0">
+              <a:lnSpc>
+                <a:spcPts val="1680"/>
+              </a:lnSpc>
+              <a:spcBef>
+                <a:spcPts val="300"/>
+              </a:spcBef>
+              <a:spcAft>
+                <a:spcPts val="300"/>
+              </a:spcAft>
+              <a:buNone/>
+            </a:pPr>
+            <a:r>
+              <a:rPr lang="en-US" sz="1200" i="1" dirty="0">
+                <a:solidFill>
+                  <a:srgbClr val="1C2833"/>
+                </a:solidFill>
+                <a:latin typeface="Arial" pitchFamily="34" charset="0"/>
+                <a:ea typeface="Arial" pitchFamily="34" charset="-122"/>
+                <a:cs typeface="Arial" pitchFamily="34" charset="-120"/>
+              </a:rPr>
+              <a:t>In both cases</a:t>
+            </a:r>
+            <a:pPr algn="l" indent="0" marL="0">
+              <a:lnSpc>
+                <a:spcPts val="1680"/>
+              </a:lnSpc>
+              <a:spcBef>
+                <a:spcPts val="300"/>
+              </a:spcBef>
+              <a:spcAft>
+                <a:spcPts val="300"/>
+              </a:spcAft>
+              <a:buNone/>
+            </a:pPr>
+            <a:r>
+              <a:rPr lang="en-US" sz="1200" dirty="0">
+                <a:solidFill>
+                  <a:srgbClr val="1C2833"/>
+                </a:solidFill>
+                <a:latin typeface="Arial" pitchFamily="34" charset="0"/>
+                <a:ea typeface="Arial" pitchFamily="34" charset="-122"/>
+                <a:cs typeface="Arial" pitchFamily="34" charset="-120"/>
+              </a:rPr>
+              <a:t> the right part is a positive product. The sign issue only appears in the </a:t>
+            </a:r>
+            <a:pPr algn="l" indent="0" marL="0">
+              <a:lnSpc>
+                <a:spcPts val="1680"/>
+              </a:lnSpc>
+              <a:spcBef>
+                <a:spcPts val="300"/>
+              </a:spcBef>
+              <a:spcAft>
+                <a:spcPts val="300"/>
+              </a:spcAft>
+              <a:buNone/>
+            </a:pPr>
+            <a:r>
+              <a:rPr lang="en-US" sz="1200" i="1" dirty="0">
+                <a:solidFill>
+                  <a:srgbClr val="1C2833"/>
+                </a:solidFill>
+                <a:latin typeface="Arial" pitchFamily="34" charset="0"/>
+                <a:ea typeface="Arial" pitchFamily="34" charset="-122"/>
+                <a:cs typeface="Arial" pitchFamily="34" charset="-120"/>
+              </a:rPr>
+              <a:t>mixed</a:t>
+            </a:r>
+            <a:pPr algn="l" indent="0" marL="0">
+              <a:lnSpc>
+                <a:spcPts val="1680"/>
+              </a:lnSpc>
+              <a:spcBef>
+                <a:spcPts val="300"/>
+              </a:spcBef>
+              <a:spcAft>
+                <a:spcPts val="300"/>
+              </a:spcAft>
+              <a:buNone/>
+            </a:pPr>
+            <a:r>
+              <a:rPr lang="en-US" sz="1200" dirty="0">
+                <a:solidFill>
+                  <a:srgbClr val="1C2833"/>
+                </a:solidFill>
+                <a:latin typeface="Arial" pitchFamily="34" charset="0"/>
+                <a:ea typeface="Arial" pitchFamily="34" charset="-122"/>
+                <a:cs typeface="Arial" pitchFamily="34" charset="-120"/>
+              </a:rPr>
+              <a:t> case (Day 5).</a:t>
+            </a:r>
+            <a:endParaRPr lang="en-US" sz="1200" dirty="0"/>
+          </a:p>
+        </p:txBody>
+      </p:sp>
+      <p:sp>
+        <p:nvSpPr>
+          <p:cNvPr id="21" name="Text 19"/>
+          <p:cNvSpPr/>
+          <p:nvPr/>
+        </p:nvSpPr>
+        <p:spPr>
+          <a:xfrm>
+            <a:off x="634901" y="6199138"/>
             <a:ext cx="8102798" cy="300930"/>
           </a:xfrm>
           <a:prstGeom prst="rect">
@@ -5560,13 +5835,13 @@
       </p:sp>
       <p:sp>
         <p:nvSpPr>
-          <p:cNvPr id="19" name="Text 17"/>
+          <p:cNvPr id="22" name="Text 20"/>
           <p:cNvSpPr/>
           <p:nvPr/>
         </p:nvSpPr>
         <p:spPr>
           <a:xfrm>
-            <a:off x="406301" y="6547545"/>
+            <a:off x="406301" y="6588919"/>
             <a:ext cx="8498026" cy="436066"/>
           </a:xfrm>
           <a:prstGeom prst="rect">
@@ -5884,13 +6159,13 @@
       </p:sp>
       <p:sp>
         <p:nvSpPr>
-          <p:cNvPr id="20" name="Text 18"/>
+          <p:cNvPr id="23" name="Text 21"/>
           <p:cNvSpPr/>
           <p:nvPr/>
         </p:nvSpPr>
         <p:spPr>
           <a:xfrm>
-            <a:off x="406301" y="7136011"/>
+            <a:off x="406301" y="7177385"/>
             <a:ext cx="8498026" cy="213271"/>
           </a:xfrm>
           <a:prstGeom prst="rect">
@@ -6445,7 +6720,30 @@
                 <a:ea typeface="Arial" pitchFamily="34" charset="-122"/>
                 <a:cs typeface="Arial" pitchFamily="34" charset="-120"/>
               </a:rPr>
-              <a:t>Answer key (teacher):</a:t>
+              <a:t>Answer key (teacher): </a:t>
+            </a:r>
+            <a:pPr algn="l" indent="0" marL="0">
+              <a:lnSpc>
+                <a:spcPts val="1680"/>
+              </a:lnSpc>
+              <a:spcBef>
+                <a:spcPts val="300"/>
+              </a:spcBef>
+              <a:spcAft>
+                <a:spcPts val="300"/>
+              </a:spcAft>
+              <a:buNone/>
+            </a:pPr>
+            <a:r>
+              <a:rPr lang="en-US" sz="1200" i="1" dirty="0">
+                <a:solidFill>
+                  <a:srgbClr val="1C2833"/>
+                </a:solidFill>
+                <a:latin typeface="Arial" pitchFamily="34" charset="0"/>
+                <a:ea typeface="Arial" pitchFamily="34" charset="-122"/>
+                <a:cs typeface="Arial" pitchFamily="34" charset="-120"/>
+              </a:rPr>
+              <a:t>Each row: Q · Sign · Cross · Left · Right · Answer.</a:t>
             </a:r>
             <a:endParaRPr lang="en-US" sz="1200" dirty="0"/>
           </a:p>
@@ -6459,7 +6757,469 @@
         </p:nvSpPr>
         <p:spPr>
           <a:xfrm>
-            <a:off x="406301" y="6304508"/>
+            <a:off x="634901" y="3232249"/>
+            <a:ext cx="8102798" cy="2475905"/>
+          </a:xfrm>
+          <a:prstGeom prst="rect">
+            <a:avLst/>
+          </a:prstGeom>
+          <a:noFill/>
+          <a:ln/>
+        </p:spPr>
+        <p:txBody>
+          <a:bodyPr wrap="square" lIns="0" tIns="0" rIns="0" bIns="0" rtlCol="0" anchor="t"/>
+          <a:lstStyle/>
+          <a:p>
+            <a:pPr algn="l" marL="342900" indent="-342900">
+              <a:lnSpc>
+                <a:spcPts val="1620"/>
+              </a:lnSpc>
+              <a:spcAft>
+                <a:spcPts val="300"/>
+              </a:spcAft>
+              <a:buSzPct val="100000"/>
+              <a:buChar char="•"/>
+            </a:pPr>
+            <a:r>
+              <a:rPr lang="en-US" sz="1200" b="1" dirty="0">
+                <a:solidFill>
+                  <a:srgbClr val="1C2833"/>
+                </a:solidFill>
+                <a:latin typeface="Arial" pitchFamily="34" charset="0"/>
+                <a:ea typeface="Arial" pitchFamily="34" charset="-122"/>
+                <a:cs typeface="Arial" pitchFamily="34" charset="-120"/>
+              </a:rPr>
+              <a:t>1</a:t>
+            </a:r>
+            <a:pPr algn="l" indent="0" marL="0">
+              <a:lnSpc>
+                <a:spcPts val="1620"/>
+              </a:lnSpc>
+              <a:spcAft>
+                <a:spcPts val="300"/>
+              </a:spcAft>
+              <a:buNone/>
+            </a:pPr>
+            <a:r>
+              <a:rPr lang="en-US" sz="1200" dirty="0">
+                <a:solidFill>
+                  <a:srgbClr val="1C2833"/>
+                </a:solidFill>
+                <a:latin typeface="Arial" pitchFamily="34" charset="0"/>
+                <a:ea typeface="Arial" pitchFamily="34" charset="-122"/>
+                <a:cs typeface="Arial" pitchFamily="34" charset="-120"/>
+              </a:rPr>
+              <a:t> — both above · + · 107 · 12 · 10712</a:t>
+            </a:r>
+            <a:endParaRPr lang="en-US" sz="1200" dirty="0"/>
+          </a:p>
+          <a:p>
+            <a:pPr algn="l" marL="342900" indent="-342900">
+              <a:lnSpc>
+                <a:spcPts val="1620"/>
+              </a:lnSpc>
+              <a:spcAft>
+                <a:spcPts val="300"/>
+              </a:spcAft>
+              <a:buSzPct val="100000"/>
+              <a:buChar char="•"/>
+            </a:pPr>
+            <a:r>
+              <a:rPr lang="en-US" sz="1200" b="1" dirty="0">
+                <a:solidFill>
+                  <a:srgbClr val="1C2833"/>
+                </a:solidFill>
+                <a:latin typeface="Arial" pitchFamily="34" charset="0"/>
+                <a:ea typeface="Arial" pitchFamily="34" charset="-122"/>
+                <a:cs typeface="Arial" pitchFamily="34" charset="-120"/>
+              </a:rPr>
+              <a:t>2</a:t>
+            </a:r>
+            <a:pPr algn="l" indent="0" marL="0">
+              <a:lnSpc>
+                <a:spcPts val="1620"/>
+              </a:lnSpc>
+              <a:spcAft>
+                <a:spcPts val="300"/>
+              </a:spcAft>
+              <a:buNone/>
+            </a:pPr>
+            <a:r>
+              <a:rPr lang="en-US" sz="1200" dirty="0">
+                <a:solidFill>
+                  <a:srgbClr val="1C2833"/>
+                </a:solidFill>
+                <a:latin typeface="Arial" pitchFamily="34" charset="0"/>
+                <a:ea typeface="Arial" pitchFamily="34" charset="-122"/>
+                <a:cs typeface="Arial" pitchFamily="34" charset="-120"/>
+              </a:rPr>
+              <a:t> — both above · + · 107 · 10 · 10710</a:t>
+            </a:r>
+            <a:endParaRPr lang="en-US" sz="1200" dirty="0"/>
+          </a:p>
+          <a:p>
+            <a:pPr algn="l" marL="342900" indent="-342900">
+              <a:lnSpc>
+                <a:spcPts val="1620"/>
+              </a:lnSpc>
+              <a:spcAft>
+                <a:spcPts val="300"/>
+              </a:spcAft>
+              <a:buSzPct val="100000"/>
+              <a:buChar char="•"/>
+            </a:pPr>
+            <a:r>
+              <a:rPr lang="en-US" sz="1200" b="1" dirty="0">
+                <a:solidFill>
+                  <a:srgbClr val="1C2833"/>
+                </a:solidFill>
+                <a:latin typeface="Arial" pitchFamily="34" charset="0"/>
+                <a:ea typeface="Arial" pitchFamily="34" charset="-122"/>
+                <a:cs typeface="Arial" pitchFamily="34" charset="-120"/>
+              </a:rPr>
+              <a:t>3</a:t>
+            </a:r>
+            <a:pPr algn="l" indent="0" marL="0">
+              <a:lnSpc>
+                <a:spcPts val="1620"/>
+              </a:lnSpc>
+              <a:spcAft>
+                <a:spcPts val="300"/>
+              </a:spcAft>
+              <a:buNone/>
+            </a:pPr>
+            <a:r>
+              <a:rPr lang="en-US" sz="1200" dirty="0">
+                <a:solidFill>
+                  <a:srgbClr val="1C2833"/>
+                </a:solidFill>
+                <a:latin typeface="Arial" pitchFamily="34" charset="0"/>
+                <a:ea typeface="Arial" pitchFamily="34" charset="-122"/>
+                <a:cs typeface="Arial" pitchFamily="34" charset="-120"/>
+              </a:rPr>
+              <a:t> — both above · + · 115 · 56 · 11556</a:t>
+            </a:r>
+            <a:endParaRPr lang="en-US" sz="1200" dirty="0"/>
+          </a:p>
+          <a:p>
+            <a:pPr algn="l" marL="342900" indent="-342900">
+              <a:lnSpc>
+                <a:spcPts val="1620"/>
+              </a:lnSpc>
+              <a:spcAft>
+                <a:spcPts val="300"/>
+              </a:spcAft>
+              <a:buSzPct val="100000"/>
+              <a:buChar char="•"/>
+            </a:pPr>
+            <a:r>
+              <a:rPr lang="en-US" sz="1200" b="1" dirty="0">
+                <a:solidFill>
+                  <a:srgbClr val="1C2833"/>
+                </a:solidFill>
+                <a:latin typeface="Arial" pitchFamily="34" charset="0"/>
+                <a:ea typeface="Arial" pitchFamily="34" charset="-122"/>
+                <a:cs typeface="Arial" pitchFamily="34" charset="-120"/>
+              </a:rPr>
+              <a:t>4</a:t>
+            </a:r>
+            <a:pPr algn="l" indent="0" marL="0">
+              <a:lnSpc>
+                <a:spcPts val="1620"/>
+              </a:lnSpc>
+              <a:spcAft>
+                <a:spcPts val="300"/>
+              </a:spcAft>
+              <a:buNone/>
+            </a:pPr>
+            <a:r>
+              <a:rPr lang="en-US" sz="1200" dirty="0">
+                <a:solidFill>
+                  <a:srgbClr val="1C2833"/>
+                </a:solidFill>
+                <a:latin typeface="Arial" pitchFamily="34" charset="0"/>
+                <a:ea typeface="Arial" pitchFamily="34" charset="-122"/>
+                <a:cs typeface="Arial" pitchFamily="34" charset="-120"/>
+              </a:rPr>
+              <a:t> — both above · + · 111 · 18 · 11118</a:t>
+            </a:r>
+            <a:endParaRPr lang="en-US" sz="1200" dirty="0"/>
+          </a:p>
+          <a:p>
+            <a:pPr algn="l" marL="342900" indent="-342900">
+              <a:lnSpc>
+                <a:spcPts val="1620"/>
+              </a:lnSpc>
+              <a:spcAft>
+                <a:spcPts val="300"/>
+              </a:spcAft>
+              <a:buSzPct val="100000"/>
+              <a:buChar char="•"/>
+            </a:pPr>
+            <a:r>
+              <a:rPr lang="en-US" sz="1200" b="1" dirty="0">
+                <a:solidFill>
+                  <a:srgbClr val="1C2833"/>
+                </a:solidFill>
+                <a:latin typeface="Arial" pitchFamily="34" charset="0"/>
+                <a:ea typeface="Arial" pitchFamily="34" charset="-122"/>
+                <a:cs typeface="Arial" pitchFamily="34" charset="-120"/>
+              </a:rPr>
+              <a:t>5</a:t>
+            </a:r>
+            <a:pPr algn="l" indent="0" marL="0">
+              <a:lnSpc>
+                <a:spcPts val="1620"/>
+              </a:lnSpc>
+              <a:spcAft>
+                <a:spcPts val="300"/>
+              </a:spcAft>
+              <a:buNone/>
+            </a:pPr>
+            <a:r>
+              <a:rPr lang="en-US" sz="1200" dirty="0">
+                <a:solidFill>
+                  <a:srgbClr val="1C2833"/>
+                </a:solidFill>
+                <a:latin typeface="Arial" pitchFamily="34" charset="0"/>
+                <a:ea typeface="Arial" pitchFamily="34" charset="-122"/>
+                <a:cs typeface="Arial" pitchFamily="34" charset="-120"/>
+              </a:rPr>
+              <a:t> — both above · + · 107 · 06 · 10706</a:t>
+            </a:r>
+            <a:endParaRPr lang="en-US" sz="1200" dirty="0"/>
+          </a:p>
+          <a:p>
+            <a:pPr algn="l" marL="342900" indent="-342900">
+              <a:lnSpc>
+                <a:spcPts val="1620"/>
+              </a:lnSpc>
+              <a:spcAft>
+                <a:spcPts val="300"/>
+              </a:spcAft>
+              <a:buSzPct val="100000"/>
+              <a:buChar char="•"/>
+            </a:pPr>
+            <a:r>
+              <a:rPr lang="en-US" sz="1200" b="1" dirty="0">
+                <a:solidFill>
+                  <a:srgbClr val="1C2833"/>
+                </a:solidFill>
+                <a:latin typeface="Arial" pitchFamily="34" charset="0"/>
+                <a:ea typeface="Arial" pitchFamily="34" charset="-122"/>
+                <a:cs typeface="Arial" pitchFamily="34" charset="-120"/>
+              </a:rPr>
+              <a:t>6</a:t>
+            </a:r>
+            <a:pPr algn="l" indent="0" marL="0">
+              <a:lnSpc>
+                <a:spcPts val="1620"/>
+              </a:lnSpc>
+              <a:spcAft>
+                <a:spcPts val="300"/>
+              </a:spcAft>
+              <a:buNone/>
+            </a:pPr>
+            <a:r>
+              <a:rPr lang="en-US" sz="1200" dirty="0">
+                <a:solidFill>
+                  <a:srgbClr val="1C2833"/>
+                </a:solidFill>
+                <a:latin typeface="Arial" pitchFamily="34" charset="0"/>
+                <a:ea typeface="Arial" pitchFamily="34" charset="-122"/>
+                <a:cs typeface="Arial" pitchFamily="34" charset="-120"/>
+              </a:rPr>
+              <a:t> — both above · + · 115 · 44 · 11544</a:t>
+            </a:r>
+            <a:endParaRPr lang="en-US" sz="1200" dirty="0"/>
+          </a:p>
+          <a:p>
+            <a:pPr algn="l" marL="342900" indent="-342900">
+              <a:lnSpc>
+                <a:spcPts val="1620"/>
+              </a:lnSpc>
+              <a:spcAft>
+                <a:spcPts val="300"/>
+              </a:spcAft>
+              <a:buSzPct val="100000"/>
+              <a:buChar char="•"/>
+            </a:pPr>
+            <a:r>
+              <a:rPr lang="en-US" sz="1200" b="1" dirty="0">
+                <a:solidFill>
+                  <a:srgbClr val="1C2833"/>
+                </a:solidFill>
+                <a:latin typeface="Arial" pitchFamily="34" charset="0"/>
+                <a:ea typeface="Arial" pitchFamily="34" charset="-122"/>
+                <a:cs typeface="Arial" pitchFamily="34" charset="-120"/>
+              </a:rPr>
+              <a:t>7</a:t>
+            </a:r>
+            <a:pPr algn="l" indent="0" marL="0">
+              <a:lnSpc>
+                <a:spcPts val="1620"/>
+              </a:lnSpc>
+              <a:spcAft>
+                <a:spcPts val="300"/>
+              </a:spcAft>
+              <a:buNone/>
+            </a:pPr>
+            <a:r>
+              <a:rPr lang="en-US" sz="1200" dirty="0">
+                <a:solidFill>
+                  <a:srgbClr val="1C2833"/>
+                </a:solidFill>
+                <a:latin typeface="Arial" pitchFamily="34" charset="0"/>
+                <a:ea typeface="Arial" pitchFamily="34" charset="-122"/>
+                <a:cs typeface="Arial" pitchFamily="34" charset="-120"/>
+              </a:rPr>
+              <a:t> — both above · + · 125+1=126 · 56 · 12656</a:t>
+            </a:r>
+            <a:endParaRPr lang="en-US" sz="1200" dirty="0"/>
+          </a:p>
+          <a:p>
+            <a:pPr algn="l" marL="342900" indent="-342900">
+              <a:lnSpc>
+                <a:spcPts val="1620"/>
+              </a:lnSpc>
+              <a:spcAft>
+                <a:spcPts val="300"/>
+              </a:spcAft>
+              <a:buSzPct val="100000"/>
+              <a:buChar char="•"/>
+            </a:pPr>
+            <a:r>
+              <a:rPr lang="en-US" sz="1200" b="1" dirty="0">
+                <a:solidFill>
+                  <a:srgbClr val="1C2833"/>
+                </a:solidFill>
+                <a:latin typeface="Arial" pitchFamily="34" charset="0"/>
+                <a:ea typeface="Arial" pitchFamily="34" charset="-122"/>
+                <a:cs typeface="Arial" pitchFamily="34" charset="-120"/>
+              </a:rPr>
+              <a:t>8</a:t>
+            </a:r>
+            <a:pPr algn="l" indent="0" marL="0">
+              <a:lnSpc>
+                <a:spcPts val="1620"/>
+              </a:lnSpc>
+              <a:spcAft>
+                <a:spcPts val="300"/>
+              </a:spcAft>
+              <a:buNone/>
+            </a:pPr>
+            <a:r>
+              <a:rPr lang="en-US" sz="1200" dirty="0">
+                <a:solidFill>
+                  <a:srgbClr val="1C2833"/>
+                </a:solidFill>
+                <a:latin typeface="Arial" pitchFamily="34" charset="0"/>
+                <a:ea typeface="Arial" pitchFamily="34" charset="-122"/>
+                <a:cs typeface="Arial" pitchFamily="34" charset="-120"/>
+              </a:rPr>
+              <a:t> — both above · + · 115 · 54 · 11554</a:t>
+            </a:r>
+            <a:endParaRPr lang="en-US" sz="1200" dirty="0"/>
+          </a:p>
+          <a:p>
+            <a:pPr algn="l" marL="342900" indent="-342900">
+              <a:lnSpc>
+                <a:spcPts val="1620"/>
+              </a:lnSpc>
+              <a:spcAft>
+                <a:spcPts val="300"/>
+              </a:spcAft>
+              <a:buSzPct val="100000"/>
+              <a:buChar char="•"/>
+            </a:pPr>
+            <a:r>
+              <a:rPr lang="en-US" sz="1200" b="1" dirty="0">
+                <a:solidFill>
+                  <a:srgbClr val="1C2833"/>
+                </a:solidFill>
+                <a:latin typeface="Arial" pitchFamily="34" charset="0"/>
+                <a:ea typeface="Arial" pitchFamily="34" charset="-122"/>
+                <a:cs typeface="Arial" pitchFamily="34" charset="-120"/>
+              </a:rPr>
+              <a:t>9</a:t>
+            </a:r>
+            <a:pPr algn="l" indent="0" marL="0">
+              <a:lnSpc>
+                <a:spcPts val="1620"/>
+              </a:lnSpc>
+              <a:spcAft>
+                <a:spcPts val="300"/>
+              </a:spcAft>
+              <a:buNone/>
+            </a:pPr>
+            <a:r>
+              <a:rPr lang="en-US" sz="1200" dirty="0">
+                <a:solidFill>
+                  <a:srgbClr val="1C2833"/>
+                </a:solidFill>
+                <a:latin typeface="Arial" pitchFamily="34" charset="0"/>
+                <a:ea typeface="Arial" pitchFamily="34" charset="-122"/>
+                <a:cs typeface="Arial" pitchFamily="34" charset="-120"/>
+              </a:rPr>
+              <a:t> — both above · + · 106 · 09 · 10609</a:t>
+            </a:r>
+            <a:endParaRPr lang="en-US" sz="1200" dirty="0"/>
+          </a:p>
+          <a:p>
+            <a:pPr algn="l" marL="342900" indent="-342900">
+              <a:lnSpc>
+                <a:spcPts val="1620"/>
+              </a:lnSpc>
+              <a:spcAft>
+                <a:spcPts val="300"/>
+              </a:spcAft>
+              <a:buSzPct val="100000"/>
+              <a:buChar char="•"/>
+            </a:pPr>
+            <a:r>
+              <a:rPr lang="en-US" sz="1200" b="1" dirty="0">
+                <a:solidFill>
+                  <a:srgbClr val="1C2833"/>
+                </a:solidFill>
+                <a:latin typeface="Arial" pitchFamily="34" charset="0"/>
+                <a:ea typeface="Arial" pitchFamily="34" charset="-122"/>
+                <a:cs typeface="Arial" pitchFamily="34" charset="-120"/>
+              </a:rPr>
+              <a:t>10</a:t>
+            </a:r>
+            <a:pPr algn="l" indent="0" marL="0">
+              <a:lnSpc>
+                <a:spcPts val="1620"/>
+              </a:lnSpc>
+              <a:spcAft>
+                <a:spcPts val="300"/>
+              </a:spcAft>
+              <a:buNone/>
+            </a:pPr>
+            <a:r>
+              <a:rPr lang="en-US" sz="1200" dirty="0">
+                <a:solidFill>
+                  <a:srgbClr val="1C2833"/>
+                </a:solidFill>
+                <a:latin typeface="Arial" pitchFamily="34" charset="0"/>
+                <a:ea typeface="Arial" pitchFamily="34" charset="-122"/>
+                <a:cs typeface="Arial" pitchFamily="34" charset="-120"/>
+              </a:rPr>
+              <a:t> — both above · + · 110 · 25 · 11025</a:t>
+            </a:r>
+            <a:endParaRPr lang="en-US" sz="1200" dirty="0"/>
+          </a:p>
+        </p:txBody>
+      </p:sp>
+      <p:sp>
+        <p:nvSpPr>
+          <p:cNvPr id="14" name="Text 12"/>
+          <p:cNvSpPr/>
+          <p:nvPr/>
+        </p:nvSpPr>
+        <p:spPr>
+          <a:xfrm>
+            <a:off x="406301" y="5873204"/>
             <a:ext cx="8498026" cy="213271"/>
           </a:xfrm>
           <a:prstGeom prst="rect">
